--- a/skills/presentations/assets/pptx/examples/03-management-effectiveness.pptx
+++ b/skills/presentations/assets/pptx/examples/03-management-effectiveness.pptx
@@ -5,16 +5,16 @@
     <p:sldMasterId xmlns:r="http://schemas.openxmlformats.org/officeDocument/2006/relationships" id="2147483648" r:id="rId1"/>
   </p:sldMasterIdLst>
   <p:notesMasterIdLst>
-    <p:notesMasterId r:id="R532664cf1ab24fba"/>
+    <p:notesMasterId r:id="R9bfcba9b556344c3"/>
   </p:notesMasterIdLst>
   <p:sldIdLst>
-    <p:sldId id="256" r:id="R2cf4b63d7d514060"/>
-    <p:sldId id="257" r:id="Ra5131b0a7e564ecb"/>
-    <p:sldId id="258" r:id="R8062163a5e314ebf"/>
-    <p:sldId id="259" r:id="R3016aeac94ec4acd"/>
-    <p:sldId id="260" r:id="R7658319c151145ee"/>
-    <p:sldId id="261" r:id="R6783e013c8664dde"/>
-    <p:sldId id="262" r:id="R87a428eba8134f92"/>
+    <p:sldId id="256" r:id="R124f372573404dff"/>
+    <p:sldId id="257" r:id="R9b38a74a23324838"/>
+    <p:sldId id="258" r:id="Rca594f9e4e6049b9"/>
+    <p:sldId id="259" r:id="Rbce07a053b6d4f10"/>
+    <p:sldId id="260" r:id="R051c4c0516c94d35"/>
+    <p:sldId id="261" r:id="R8bf8be063e94438a"/>
+    <p:sldId id="262" r:id="R7c16887f3ee84d9e"/>
   </p:sldIdLst>
   <p:sldSz cx="12192000" cy="6858000"/>
   <p:notesSz cx="6858000" cy="9144000"/>
@@ -1430,7 +1430,7 @@
                 <a:latin typeface="Calibri"/>
                 <a:ea typeface="Calibri"/>
               </a:rPr>
-              <a:t>Outcomes: (1) RTL freeze hit 6/20 path (2) day-3 boot (3) DV farm ROI visible.</a:t>
+              <a:t>Outcomes: (1) RTL freeze held 4/10 (2) day-3 boot 5/15 (3) DV farm ROI visible.</a:t>
             </a:r>
           </a:p>
           <a:p xmlns:a="http://schemas.openxmlformats.org/drawingml/2006/main">
@@ -1575,7 +1575,7 @@
                 <a:latin typeface="Calibri"/>
                 <a:ea typeface="Calibri"/>
               </a:rPr>
-              <a:t>Freeze-ready AON decision — Hit — Option B landed May 16</a:t>
+              <a:t>Freeze-ready AON decision — Hit — Option B landed Mar 20</a:t>
             </a:r>
           </a:p>
           <a:p xmlns:a="http://schemas.openxmlformats.org/drawingml/2006/main">
@@ -1587,7 +1587,19 @@
                 <a:latin typeface="Calibri"/>
                 <a:ea typeface="Calibri"/>
               </a:rPr>
-              <a:t>Day-5 boot target — Hit — actual day 3</a:t>
+              <a:t>RTL freeze 4/10 — Hit — held</a:t>
+            </a:r>
+          </a:p>
+          <a:p xmlns:a="http://schemas.openxmlformats.org/drawingml/2006/main">
+            <a:r>
+              <a:rPr lang="en-US" sz="1600" b="0">
+                <a:solidFill>
+                  <a:srgbClr val="1A202C"/>
+                </a:solidFill>
+                <a:latin typeface="Calibri"/>
+                <a:ea typeface="Calibri"/>
+              </a:rPr>
+              <a:t>Day-5 boot target — Hit — actual day 3 (silicon 5/12)</a:t>
             </a:r>
           </a:p>
           <a:p xmlns:a="http://schemas.openxmlformats.org/drawingml/2006/main">
@@ -1925,7 +1937,7 @@
                 <a:latin typeface="Calibri"/>
                 <a:ea typeface="Calibri"/>
               </a:rPr>
-              <a:t>Mina (analog liaison) 0.5 FTE borrowed from IP team through June.</a:t>
+              <a:t>Mina (analog liaison) 0.5 FTE borrowed from IP team through mid-Q2.</a:t>
             </a:r>
           </a:p>
           <a:p xmlns:a="http://schemas.openxmlformats.org/drawingml/2006/main">
@@ -2539,7 +2551,7 @@
                 <a:latin typeface="Calibri"/>
                 <a:ea typeface="Calibri"/>
               </a:rPr>
-              <a:t>Primary ask: Endorse opening senior DV requisition (detail in resource request 2026-05-20).</a:t>
+              <a:t>Primary ask: Endorse opening senior DV requisition (detail in resource request ~2026-05-20).</a:t>
             </a:r>
           </a:p>
           <a:p xmlns:a="http://schemas.openxmlformats.org/drawingml/2006/main">
@@ -2551,7 +2563,7 @@
                 <a:latin typeface="Calibri"/>
                 <a:ea typeface="Calibri"/>
               </a:rPr>
-              <a:t>Decision by: 2026-05-20 1:1.</a:t>
+              <a:t>Decision by: 2026-05-18 1:1 (after first-silicon readout).</a:t>
             </a:r>
           </a:p>
           <a:p xmlns:a="http://schemas.openxmlformats.org/drawingml/2006/main">

--- a/skills/presentations/assets/pptx/examples/03-management-effectiveness.pptx
+++ b/skills/presentations/assets/pptx/examples/03-management-effectiveness.pptx
@@ -5,16 +5,17 @@
     <p:sldMasterId xmlns:r="http://schemas.openxmlformats.org/officeDocument/2006/relationships" id="2147483648" r:id="rId1"/>
   </p:sldMasterIdLst>
   <p:notesMasterIdLst>
-    <p:notesMasterId r:id="R9bfcba9b556344c3"/>
+    <p:notesMasterId r:id="Re1e9aea9bc754d45"/>
   </p:notesMasterIdLst>
   <p:sldIdLst>
-    <p:sldId id="256" r:id="R124f372573404dff"/>
-    <p:sldId id="257" r:id="R9b38a74a23324838"/>
-    <p:sldId id="258" r:id="Rca594f9e4e6049b9"/>
-    <p:sldId id="259" r:id="Rbce07a053b6d4f10"/>
-    <p:sldId id="260" r:id="R051c4c0516c94d35"/>
-    <p:sldId id="261" r:id="R8bf8be063e94438a"/>
-    <p:sldId id="262" r:id="R7c16887f3ee84d9e"/>
+    <p:sldId id="256" r:id="R976dc0bb3fdb4251"/>
+    <p:sldId id="257" r:id="R267ebb1719e7463c"/>
+    <p:sldId id="258" r:id="R800de08268994a4f"/>
+    <p:sldId id="259" r:id="Re23b9ff8f1d74d8e"/>
+    <p:sldId id="260" r:id="R6410bdc44fc64020"/>
+    <p:sldId id="261" r:id="R53af8803974e4da7"/>
+    <p:sldId id="262" r:id="Rc5c90a10674946cd"/>
+    <p:sldId id="263" r:id="R0164d881c694496b"/>
   </p:sldIdLst>
   <p:sldSz cx="12192000" cy="6858000"/>
   <p:notesSz cx="6858000" cy="9144000"/>
@@ -480,6 +481,30 @@
               <a:t>Cover (example). Atlas healthy on delivery; yellow on IO DV single-thread → endorse hire.</a:t>
             </a:r>
           </a:p>
+          <a:p xmlns:a="http://schemas.openxmlformats.org/drawingml/2006/main">
+            <a:r>
+              <a:rPr lang="en-US"/>
+              <a:t/>
+            </a:r>
+          </a:p>
+          <a:p xmlns:a="http://schemas.openxmlformats.org/drawingml/2006/main">
+            <a:r>
+              <a:rPr lang="en-US"/>
+              <a:t>Team health + capacity scorecard (managing up)</a:t>
+            </a:r>
+          </a:p>
+          <a:p xmlns:a="http://schemas.openxmlformats.org/drawingml/2006/main">
+            <a:r>
+              <a:rPr lang="en-US"/>
+              <a:t>The Engineering Manager — Managing upwards: https://www.theengineeringmanager.com/management-101/managing-upwards/</a:t>
+            </a:r>
+          </a:p>
+          <a:p xmlns:a="http://schemas.openxmlformats.org/drawingml/2006/main">
+            <a:r>
+              <a:rPr lang="en-US"/>
+              <a:t>Netflix culture (public) — talent density language only: https://jobs.netflix.com/culture</a:t>
+            </a:r>
+          </a:p>
         </p:txBody>
       </p:sp>
     </p:spTree>
@@ -532,7 +557,19 @@
           <a:p xmlns:a="http://schemas.openxmlformats.org/drawingml/2006/main">
             <a:r>
               <a:rPr lang="en-US"/>
-              <a:t>One ask; point to deck 06 for business case.</a:t>
+              <a:t>Team health + capacity scorecard (managing up)</a:t>
+            </a:r>
+          </a:p>
+          <a:p xmlns:a="http://schemas.openxmlformats.org/drawingml/2006/main">
+            <a:r>
+              <a:rPr lang="en-US"/>
+              <a:t>The Engineering Manager — Managing upwards: https://www.theengineeringmanager.com/management-101/managing-upwards/</a:t>
+            </a:r>
+          </a:p>
+          <a:p xmlns:a="http://schemas.openxmlformats.org/drawingml/2006/main">
+            <a:r>
+              <a:rPr lang="en-US"/>
+              <a:t>Netflix culture (public) — talent density language only: https://jobs.netflix.com/culture</a:t>
             </a:r>
           </a:p>
         </p:txBody>
@@ -587,7 +624,7 @@
           <a:p xmlns:a="http://schemas.openxmlformats.org/drawingml/2006/main">
             <a:r>
               <a:rPr lang="en-US"/>
-              <a:t>Honest partial on USB3.</a:t>
+              <a:t>One ask; point to deck 06 for business case.</a:t>
             </a:r>
           </a:p>
         </p:txBody>
@@ -642,7 +679,7 @@
           <a:p xmlns:a="http://schemas.openxmlformats.org/drawingml/2006/main">
             <a:r>
               <a:rPr lang="en-US"/>
-              <a:t>Explain A vs planned; HC uses B in deck 06.</a:t>
+              <a:t>Honest partial on USB3.</a:t>
             </a:r>
           </a:p>
         </p:txBody>
@@ -697,7 +734,7 @@
           <a:p xmlns:a="http://schemas.openxmlformats.org/drawingml/2006/main">
             <a:r>
               <a:rPr lang="en-US"/>
-              <a:t>Facts + ask, no blame.</a:t>
+              <a:t>Explain A vs planned; HC uses B in deck 06.</a:t>
             </a:r>
           </a:p>
         </p:txBody>
@@ -752,7 +789,7 @@
           <a:p xmlns:a="http://schemas.openxmlformats.org/drawingml/2006/main">
             <a:r>
               <a:rPr lang="en-US"/>
-              <a:t>Walk trade-offs; land recommendation.</a:t>
+              <a:t>Facts + ask, no blame.</a:t>
             </a:r>
           </a:p>
         </p:txBody>
@@ -766,6 +803,61 @@
 </file>
 
 <file path=ppt/notesSlides/notesSlide7.xml><?xml version="1.0" encoding="utf-8"?>
+<p:notes xmlns:p="http://schemas.openxmlformats.org/presentationml/2006/main">
+  <p:cSld>
+    <p:spTree>
+      <p:nvGrpSpPr>
+        <p:cNvPr id="1" name=""/>
+        <p:cNvGrpSpPr/>
+        <p:nvPr/>
+      </p:nvGrpSpPr>
+      <p:grpSpPr>
+        <a:xfrm xmlns:a="http://schemas.openxmlformats.org/drawingml/2006/main"/>
+      </p:grpSpPr>
+      <p:sp>
+        <p:nvSpPr>
+          <p:cNvPr id="2" name="Slide Image Placeholder 1"/>
+          <p:cNvSpPr/>
+          <p:nvPr>
+            <p:ph type="sldImg" idx="0"/>
+          </p:nvPr>
+        </p:nvSpPr>
+        <p:spPr/>
+        <p:txBody>
+          <a:bodyPr xmlns:a="http://schemas.openxmlformats.org/drawingml/2006/main"/>
+          <a:lstStyle xmlns:a="http://schemas.openxmlformats.org/drawingml/2006/main"/>
+          <a:p xmlns:a="http://schemas.openxmlformats.org/drawingml/2006/main"/>
+        </p:txBody>
+      </p:sp>
+      <p:sp>
+        <p:nvSpPr>
+          <p:cNvPr id="3" name="Notes Placeholder 2"/>
+          <p:cNvSpPr/>
+          <p:nvPr>
+            <p:ph type="body" idx="1"/>
+          </p:nvPr>
+        </p:nvSpPr>
+        <p:spPr/>
+        <p:txBody>
+          <a:bodyPr xmlns:a="http://schemas.openxmlformats.org/drawingml/2006/main"/>
+          <a:lstStyle xmlns:a="http://schemas.openxmlformats.org/drawingml/2006/main"/>
+          <a:p xmlns:a="http://schemas.openxmlformats.org/drawingml/2006/main">
+            <a:r>
+              <a:rPr lang="en-US"/>
+              <a:t>Walk trade-offs; land recommendation.</a:t>
+            </a:r>
+          </a:p>
+        </p:txBody>
+      </p:sp>
+    </p:spTree>
+  </p:cSld>
+  <p:clrMapOvr>
+    <a:masterClrMapping xmlns:a="http://schemas.openxmlformats.org/drawingml/2006/main"/>
+  </p:clrMapOvr>
+</p:notes>
+</file>
+
+<file path=ppt/notesSlides/notesSlide8.xml><?xml version="1.0" encoding="utf-8"?>
 <p:notes xmlns:p="http://schemas.openxmlformats.org/presentationml/2006/main">
   <p:cSld>
     <p:spTree>
@@ -1135,8 +1227,8 @@
         </p:nvSpPr>
         <p:spPr>
           <a:xfrm xmlns:a="http://schemas.openxmlformats.org/drawingml/2006/main">
-            <a:off x="504000" y="1008000"/>
-            <a:ext cx="11088000" cy="324000"/>
+            <a:off x="504000" y="936000"/>
+            <a:ext cx="11088000" cy="306000"/>
           </a:xfrm>
           <a:prstGeom xmlns:a="http://schemas.openxmlformats.org/drawingml/2006/main" prst="rect">
             <a:avLst/>
@@ -1167,8 +1259,8 @@
         </p:nvSpPr>
         <p:spPr>
           <a:xfrm xmlns:a="http://schemas.openxmlformats.org/drawingml/2006/main">
-            <a:off x="504000" y="1440000"/>
-            <a:ext cx="11088000" cy="936000"/>
+            <a:off x="504000" y="1332000"/>
+            <a:ext cx="11088000" cy="900000"/>
           </a:xfrm>
           <a:prstGeom xmlns:a="http://schemas.openxmlformats.org/drawingml/2006/main" prst="rect">
             <a:avLst/>
@@ -1179,7 +1271,7 @@
           <a:lstStyle xmlns:a="http://schemas.openxmlformats.org/drawingml/2006/main"/>
           <a:p xmlns:a="http://schemas.openxmlformats.org/drawingml/2006/main">
             <a:r>
-              <a:rPr lang="en-US" sz="3400" b="1">
+              <a:rPr lang="en-US" sz="3200" b="1">
                 <a:solidFill>
                   <a:srgbClr val="FFFFFF"/>
                 </a:solidFill>
@@ -1199,8 +1291,8 @@
         </p:nvSpPr>
         <p:spPr>
           <a:xfrm xmlns:a="http://schemas.openxmlformats.org/drawingml/2006/main">
-            <a:off x="504000" y="2520000"/>
-            <a:ext cx="11088000" cy="720000"/>
+            <a:off x="504000" y="2340000"/>
+            <a:ext cx="11088000" cy="648000"/>
           </a:xfrm>
           <a:prstGeom xmlns:a="http://schemas.openxmlformats.org/drawingml/2006/main" prst="rect">
             <a:avLst/>
@@ -1211,7 +1303,7 @@
           <a:lstStyle xmlns:a="http://schemas.openxmlformats.org/drawingml/2006/main"/>
           <a:p xmlns:a="http://schemas.openxmlformats.org/drawingml/2006/main">
             <a:r>
-              <a:rPr lang="en-US" sz="1700" b="0">
+              <a:rPr lang="en-US" sz="1600" b="0">
                 <a:solidFill>
                   <a:srgbClr val="CADCFC"/>
                 </a:solidFill>
@@ -1226,6 +1318,38 @@
       <p:sp>
         <p:nvSpPr>
           <p:cNvPr id="100003" name="TextBox 4"/>
+          <p:cNvSpPr txBox="1"/>
+          <p:nvPr/>
+        </p:nvSpPr>
+        <p:spPr>
+          <a:xfrm xmlns:a="http://schemas.openxmlformats.org/drawingml/2006/main">
+            <a:off x="504000" y="3240000"/>
+            <a:ext cx="11088000" cy="576000"/>
+          </a:xfrm>
+          <a:prstGeom xmlns:a="http://schemas.openxmlformats.org/drawingml/2006/main" prst="rect">
+            <a:avLst/>
+          </a:prstGeom>
+        </p:spPr>
+        <p:txBody>
+          <a:bodyPr xmlns:a="http://schemas.openxmlformats.org/drawingml/2006/main"/>
+          <a:lstStyle xmlns:a="http://schemas.openxmlformats.org/drawingml/2006/main"/>
+          <a:p xmlns:a="http://schemas.openxmlformats.org/drawingml/2006/main">
+            <a:r>
+              <a:rPr lang="en-US" sz="1400" b="0">
+                <a:solidFill>
+                  <a:srgbClr val="A0C4E8"/>
+                </a:solidFill>
+                <a:latin typeface="Calibri"/>
+                <a:ea typeface="Calibri"/>
+              </a:rPr>
+              <a:t>Pattern: Team health + capacity scorecard (managing up)</a:t>
+            </a:r>
+          </a:p>
+        </p:txBody>
+      </p:sp>
+      <p:sp>
+        <p:nvSpPr>
+          <p:cNvPr id="100004" name="TextBox 5"/>
           <p:cNvSpPr txBox="1"/>
           <p:nvPr/>
         </p:nvSpPr>
@@ -1261,6 +1385,279 @@
 </file>
 
 <file path=ppt/slides/slide2.xml><?xml version="1.0" encoding="utf-8"?>
+<p:sld xmlns:p="http://schemas.openxmlformats.org/presentationml/2006/main">
+  <p:cSld name="Pattern provenance">
+    <p:bg>
+      <p:bgPr>
+        <a:solidFill xmlns:a="http://schemas.openxmlformats.org/drawingml/2006/main">
+          <a:srgbClr val="F4F7FC"/>
+        </a:solidFill>
+      </p:bgPr>
+    </p:bg>
+    <p:spTree>
+      <p:nvGrpSpPr>
+        <p:cNvPr id="1" name=""/>
+        <p:cNvGrpSpPr/>
+        <p:nvPr/>
+      </p:nvGrpSpPr>
+      <p:grpSpPr/>
+      <p:sp>
+        <p:nvSpPr>
+          <p:cNvPr id="100005" name="TextBox 1"/>
+          <p:cNvSpPr txBox="1"/>
+          <p:nvPr/>
+        </p:nvSpPr>
+        <p:spPr>
+          <a:xfrm xmlns:a="http://schemas.openxmlformats.org/drawingml/2006/main">
+            <a:off x="504000" y="270000"/>
+            <a:ext cx="11088000" cy="270000"/>
+          </a:xfrm>
+          <a:prstGeom xmlns:a="http://schemas.openxmlformats.org/drawingml/2006/main" prst="rect">
+            <a:avLst/>
+          </a:prstGeom>
+        </p:spPr>
+        <p:txBody>
+          <a:bodyPr xmlns:a="http://schemas.openxmlformats.org/drawingml/2006/main"/>
+          <a:lstStyle xmlns:a="http://schemas.openxmlformats.org/drawingml/2006/main"/>
+          <a:p xmlns:a="http://schemas.openxmlformats.org/drawingml/2006/main">
+            <a:r>
+              <a:rPr lang="en-US" sz="1100" b="1">
+                <a:solidFill>
+                  <a:srgbClr val="2B6CB0"/>
+                </a:solidFill>
+                <a:latin typeface="Calibri"/>
+                <a:ea typeface="Calibri"/>
+              </a:rPr>
+              <a:t>WHERE THIS DECK SHAPE COMES FROM</a:t>
+            </a:r>
+          </a:p>
+        </p:txBody>
+      </p:sp>
+      <p:sp>
+        <p:nvSpPr>
+          <p:cNvPr id="100006" name="TextBox 2"/>
+          <p:cNvSpPr txBox="1"/>
+          <p:nvPr/>
+        </p:nvSpPr>
+        <p:spPr>
+          <a:xfrm xmlns:a="http://schemas.openxmlformats.org/drawingml/2006/main">
+            <a:off x="504000" y="558000"/>
+            <a:ext cx="11088000" cy="612000"/>
+          </a:xfrm>
+          <a:prstGeom xmlns:a="http://schemas.openxmlformats.org/drawingml/2006/main" prst="rect">
+            <a:avLst/>
+          </a:prstGeom>
+        </p:spPr>
+        <p:txBody>
+          <a:bodyPr xmlns:a="http://schemas.openxmlformats.org/drawingml/2006/main"/>
+          <a:lstStyle xmlns:a="http://schemas.openxmlformats.org/drawingml/2006/main"/>
+          <a:p xmlns:a="http://schemas.openxmlformats.org/drawingml/2006/main">
+            <a:r>
+              <a:rPr lang="en-US" sz="2800" b="1">
+                <a:solidFill>
+                  <a:srgbClr val="1A202C"/>
+                </a:solidFill>
+                <a:latin typeface="Calibri"/>
+                <a:ea typeface="Calibri"/>
+              </a:rPr>
+              <a:t>Pattern provenance</a:t>
+            </a:r>
+          </a:p>
+        </p:txBody>
+      </p:sp>
+      <p:sp>
+        <p:nvSpPr>
+          <p:cNvPr id="100007" name="TextBox 3"/>
+          <p:cNvSpPr txBox="1"/>
+          <p:nvPr/>
+        </p:nvSpPr>
+        <p:spPr>
+          <a:xfrm xmlns:a="http://schemas.openxmlformats.org/drawingml/2006/main">
+            <a:off x="504000" y="1260000"/>
+            <a:ext cx="11088000" cy="4860000"/>
+          </a:xfrm>
+          <a:prstGeom xmlns:a="http://schemas.openxmlformats.org/drawingml/2006/main" prst="rect">
+            <a:avLst/>
+          </a:prstGeom>
+          <a:solidFill xmlns:a="http://schemas.openxmlformats.org/drawingml/2006/main">
+            <a:srgbClr val="FFFFFF"/>
+          </a:solidFill>
+        </p:spPr>
+        <p:txBody>
+          <a:bodyPr xmlns:a="http://schemas.openxmlformats.org/drawingml/2006/main"/>
+          <a:lstStyle xmlns:a="http://schemas.openxmlformats.org/drawingml/2006/main"/>
+          <a:p xmlns:a="http://schemas.openxmlformats.org/drawingml/2006/main">
+            <a:r>
+              <a:rPr lang="en-US" sz="1500" b="0">
+                <a:solidFill>
+                  <a:srgbClr val="1A202C"/>
+                </a:solidFill>
+                <a:latin typeface="Calibri"/>
+                <a:ea typeface="Calibri"/>
+              </a:rPr>
+              <a:t>Public pattern (structure only — not a confidential company deck):</a:t>
+            </a:r>
+          </a:p>
+          <a:p xmlns:a="http://schemas.openxmlformats.org/drawingml/2006/main">
+            <a:r>
+              <a:rPr lang="en-US" sz="1500" b="0">
+                <a:solidFill>
+                  <a:srgbClr val="1A202C"/>
+                </a:solidFill>
+                <a:latin typeface="Calibri"/>
+                <a:ea typeface="Calibri"/>
+              </a:rPr>
+              <a:t/>
+            </a:r>
+          </a:p>
+          <a:p xmlns:a="http://schemas.openxmlformats.org/drawingml/2006/main">
+            <a:r>
+              <a:rPr lang="en-US" sz="1500" b="0">
+                <a:solidFill>
+                  <a:srgbClr val="1A202C"/>
+                </a:solidFill>
+                <a:latin typeface="Calibri"/>
+                <a:ea typeface="Calibri"/>
+              </a:rPr>
+              <a:t>Team health + capacity scorecard (managing up)</a:t>
+            </a:r>
+          </a:p>
+          <a:p xmlns:a="http://schemas.openxmlformats.org/drawingml/2006/main">
+            <a:r>
+              <a:rPr lang="en-US" sz="1500" b="0">
+                <a:solidFill>
+                  <a:srgbClr val="1A202C"/>
+                </a:solidFill>
+                <a:latin typeface="Calibri"/>
+                <a:ea typeface="Calibri"/>
+              </a:rPr>
+              <a:t/>
+            </a:r>
+          </a:p>
+          <a:p xmlns:a="http://schemas.openxmlformats.org/drawingml/2006/main">
+            <a:r>
+              <a:rPr lang="en-US" sz="1500" b="0">
+                <a:solidFill>
+                  <a:srgbClr val="1A202C"/>
+                </a:solidFill>
+                <a:latin typeface="Calibri"/>
+                <a:ea typeface="Calibri"/>
+              </a:rPr>
+              <a:t>• The Engineering Manager — Managing upwards</a:t>
+            </a:r>
+          </a:p>
+          <a:p xmlns:a="http://schemas.openxmlformats.org/drawingml/2006/main">
+            <a:r>
+              <a:rPr lang="en-US" sz="1500" b="0">
+                <a:solidFill>
+                  <a:srgbClr val="1A202C"/>
+                </a:solidFill>
+                <a:latin typeface="Calibri"/>
+                <a:ea typeface="Calibri"/>
+              </a:rPr>
+              <a:t>  https://www.theengineeringmanager.com/management-101/managing-upwards/</a:t>
+            </a:r>
+          </a:p>
+          <a:p xmlns:a="http://schemas.openxmlformats.org/drawingml/2006/main">
+            <a:r>
+              <a:rPr lang="en-US" sz="1500" b="0">
+                <a:solidFill>
+                  <a:srgbClr val="1A202C"/>
+                </a:solidFill>
+                <a:latin typeface="Calibri"/>
+                <a:ea typeface="Calibri"/>
+              </a:rPr>
+              <a:t>• Netflix culture (public) — talent density language only</a:t>
+            </a:r>
+          </a:p>
+          <a:p xmlns:a="http://schemas.openxmlformats.org/drawingml/2006/main">
+            <a:r>
+              <a:rPr lang="en-US" sz="1500" b="0">
+                <a:solidFill>
+                  <a:srgbClr val="1A202C"/>
+                </a:solidFill>
+                <a:latin typeface="Calibri"/>
+                <a:ea typeface="Calibri"/>
+              </a:rPr>
+              <a:t>  https://jobs.netflix.com/culture</a:t>
+            </a:r>
+          </a:p>
+          <a:p xmlns:a="http://schemas.openxmlformats.org/drawingml/2006/main">
+            <a:r>
+              <a:rPr lang="en-US" sz="1500" b="0">
+                <a:solidFill>
+                  <a:srgbClr val="1A202C"/>
+                </a:solidFill>
+                <a:latin typeface="Calibri"/>
+                <a:ea typeface="Calibri"/>
+              </a:rPr>
+              <a:t/>
+            </a:r>
+          </a:p>
+          <a:p xmlns:a="http://schemas.openxmlformats.org/drawingml/2006/main">
+            <a:r>
+              <a:rPr lang="en-US" sz="1500" b="0">
+                <a:solidFill>
+                  <a:srgbClr val="1A202C"/>
+                </a:solidFill>
+                <a:latin typeface="Calibri"/>
+                <a:ea typeface="Calibri"/>
+              </a:rPr>
+              <a:t>How to use: copy section order and decision verbs; replace with your metrics.</a:t>
+            </a:r>
+          </a:p>
+          <a:p xmlns:a="http://schemas.openxmlformats.org/drawingml/2006/main">
+            <a:r>
+              <a:rPr lang="en-US" sz="1500" b="0">
+                <a:solidFill>
+                  <a:srgbClr val="1A202C"/>
+                </a:solidFill>
+                <a:latin typeface="Calibri"/>
+                <a:ea typeface="Calibri"/>
+              </a:rPr>
+              <a:t>In-repo: skills/presentations/classic-public-cases.md</a:t>
+            </a:r>
+          </a:p>
+        </p:txBody>
+      </p:sp>
+      <p:sp>
+        <p:nvSpPr>
+          <p:cNvPr id="100008" name="TextBox 4"/>
+          <p:cNvSpPr txBox="1"/>
+          <p:nvPr/>
+        </p:nvSpPr>
+        <p:spPr>
+          <a:xfrm xmlns:a="http://schemas.openxmlformats.org/drawingml/2006/main">
+            <a:off x="504000" y="6426000"/>
+            <a:ext cx="11088000" cy="306000"/>
+          </a:xfrm>
+          <a:prstGeom xmlns:a="http://schemas.openxmlformats.org/drawingml/2006/main" prst="rect">
+            <a:avLst/>
+          </a:prstGeom>
+        </p:spPr>
+        <p:txBody>
+          <a:bodyPr xmlns:a="http://schemas.openxmlformats.org/drawingml/2006/main"/>
+          <a:lstStyle xmlns:a="http://schemas.openxmlformats.org/drawingml/2006/main"/>
+          <a:p xmlns:a="http://schemas.openxmlformats.org/drawingml/2006/main">
+            <a:r>
+              <a:rPr lang="en-US" sz="1100" b="0">
+                <a:solidFill>
+                  <a:srgbClr val="718096"/>
+                </a:solidFill>
+                <a:latin typeface="Calibri"/>
+                <a:ea typeface="Calibri"/>
+              </a:rPr>
+              <a:t>Atlas Platform  ·  Project Aurora  ·  NovaSemi  ·  2026</a:t>
+            </a:r>
+          </a:p>
+        </p:txBody>
+      </p:sp>
+    </p:spTree>
+  </p:cSld>
+</p:sld>
+</file>
+
+<file path=ppt/slides/slide3.xml><?xml version="1.0" encoding="utf-8"?>
 <p:sld xmlns:p="http://schemas.openxmlformats.org/presentationml/2006/main">
   <p:cSld name="BLUF — delivery green, capacity tight">
     <p:bg>
@@ -1279,7 +1676,7 @@
       <p:grpSpPr/>
       <p:sp>
         <p:nvSpPr>
-          <p:cNvPr id="100004" name="TextBox 1"/>
+          <p:cNvPr id="100009" name="TextBox 1"/>
           <p:cNvSpPr txBox="1"/>
           <p:nvPr/>
         </p:nvSpPr>
@@ -1311,7 +1708,7 @@
       </p:sp>
       <p:sp>
         <p:nvSpPr>
-          <p:cNvPr id="100005" name="TextBox 2"/>
+          <p:cNvPr id="100010" name="TextBox 2"/>
           <p:cNvSpPr txBox="1"/>
           <p:nvPr/>
         </p:nvSpPr>
@@ -1343,7 +1740,7 @@
       </p:sp>
       <p:sp>
         <p:nvSpPr>
-          <p:cNvPr id="100006" name="TextBox 3"/>
+          <p:cNvPr id="100011" name="TextBox 3"/>
           <p:cNvSpPr txBox="1"/>
           <p:nvPr/>
         </p:nvSpPr>
@@ -1378,7 +1775,7 @@
       </p:sp>
       <p:sp>
         <p:nvSpPr>
-          <p:cNvPr id="100007" name="TextBox 4"/>
+          <p:cNvPr id="100012" name="TextBox 4"/>
           <p:cNvSpPr txBox="1"/>
           <p:nvPr/>
         </p:nvSpPr>
@@ -1461,7 +1858,7 @@
       </p:sp>
       <p:sp>
         <p:nvSpPr>
-          <p:cNvPr id="100008" name="TextBox 5"/>
+          <p:cNvPr id="100013" name="TextBox 5"/>
           <p:cNvSpPr txBox="1"/>
           <p:nvPr/>
         </p:nvSpPr>
@@ -1496,7 +1893,7 @@
 </p:sld>
 </file>
 
-<file path=ppt/slides/slide3.xml><?xml version="1.0" encoding="utf-8"?>
+<file path=ppt/slides/slide4.xml><?xml version="1.0" encoding="utf-8"?>
 <p:sld xmlns:p="http://schemas.openxmlformats.org/presentationml/2006/main">
   <p:cSld name="Outcomes vs commits">
     <p:bg>
@@ -1515,7 +1912,7 @@
       <p:grpSpPr/>
       <p:sp>
         <p:nvSpPr>
-          <p:cNvPr id="100009" name="TextBox 1"/>
+          <p:cNvPr id="100014" name="TextBox 1"/>
           <p:cNvSpPr txBox="1"/>
           <p:nvPr/>
         </p:nvSpPr>
@@ -1547,7 +1944,7 @@
       </p:sp>
       <p:sp>
         <p:nvSpPr>
-          <p:cNvPr id="100010" name="TextBox 2"/>
+          <p:cNvPr id="100015" name="TextBox 2"/>
           <p:cNvSpPr txBox="1"/>
           <p:nvPr/>
         </p:nvSpPr>
@@ -1630,7 +2027,7 @@
       </p:sp>
       <p:sp>
         <p:nvSpPr>
-          <p:cNvPr id="100011" name="TextBox 3"/>
+          <p:cNvPr id="100016" name="TextBox 3"/>
           <p:cNvSpPr txBox="1"/>
           <p:nvPr/>
         </p:nvSpPr>
@@ -1665,7 +2062,7 @@
 </p:sld>
 </file>
 
-<file path=ppt/slides/slide4.xml><?xml version="1.0" encoding="utf-8"?>
+<file path=ppt/slides/slide5.xml><?xml version="1.0" encoding="utf-8"?>
 <p:sld xmlns:p="http://schemas.openxmlformats.org/presentationml/2006/main">
   <p:cSld name="Capacity reality (context A)">
     <p:bg>
@@ -1684,7 +2081,7 @@
       <p:grpSpPr/>
       <p:sp>
         <p:nvSpPr>
-          <p:cNvPr id="100012" name="TextBox 1"/>
+          <p:cNvPr id="100017" name="TextBox 1"/>
           <p:cNvSpPr txBox="1"/>
           <p:nvPr/>
         </p:nvSpPr>
@@ -1716,7 +2113,7 @@
       </p:sp>
       <p:sp>
         <p:nvSpPr>
-          <p:cNvPr id="100013" name="TextBox 2"/>
+          <p:cNvPr id="100018" name="TextBox 2"/>
           <p:cNvSpPr txBox="1"/>
           <p:nvPr/>
         </p:nvSpPr>
@@ -1811,7 +2208,7 @@
       </p:sp>
       <p:sp>
         <p:nvSpPr>
-          <p:cNvPr id="100014" name="TextBox 3"/>
+          <p:cNvPr id="100019" name="TextBox 3"/>
           <p:cNvSpPr txBox="1"/>
           <p:nvPr/>
         </p:nvSpPr>
@@ -1846,7 +2243,7 @@
 </p:sld>
 </file>
 
-<file path=ppt/slides/slide5.xml><?xml version="1.0" encoding="utf-8"?>
+<file path=ppt/slides/slide6.xml><?xml version="1.0" encoding="utf-8"?>
 <p:sld xmlns:p="http://schemas.openxmlformats.org/presentationml/2006/main">
   <p:cSld name="People &amp; capability">
     <p:bg>
@@ -1865,7 +2262,7 @@
       <p:grpSpPr/>
       <p:sp>
         <p:nvSpPr>
-          <p:cNvPr id="100015" name="TextBox 1"/>
+          <p:cNvPr id="100020" name="TextBox 1"/>
           <p:cNvSpPr txBox="1"/>
           <p:nvPr/>
         </p:nvSpPr>
@@ -1897,7 +2294,7 @@
       </p:sp>
       <p:sp>
         <p:nvSpPr>
-          <p:cNvPr id="100016" name="TextBox 2"/>
+          <p:cNvPr id="100021" name="TextBox 2"/>
           <p:cNvSpPr txBox="1"/>
           <p:nvPr/>
         </p:nvSpPr>
@@ -1980,7 +2377,7 @@
       </p:sp>
       <p:sp>
         <p:nvSpPr>
-          <p:cNvPr id="100017" name="TextBox 3"/>
+          <p:cNvPr id="100022" name="TextBox 3"/>
           <p:cNvSpPr txBox="1"/>
           <p:nvPr/>
         </p:nvSpPr>
@@ -2015,7 +2412,7 @@
 </p:sld>
 </file>
 
-<file path=ppt/slides/slide6.xml><?xml version="1.0" encoding="utf-8"?>
+<file path=ppt/slides/slide7.xml><?xml version="1.0" encoding="utf-8"?>
 <p:sld xmlns:p="http://schemas.openxmlformats.org/presentationml/2006/main">
   <p:cSld name="Options &amp; recommendation">
     <p:bg>
@@ -2034,7 +2431,7 @@
       <p:grpSpPr/>
       <p:sp>
         <p:nvSpPr>
-          <p:cNvPr id="100018" name="TextBox 1"/>
+          <p:cNvPr id="100023" name="TextBox 1"/>
           <p:cNvSpPr txBox="1"/>
           <p:nvPr/>
         </p:nvSpPr>
@@ -2066,7 +2463,7 @@
       </p:sp>
       <p:sp>
         <p:nvSpPr>
-          <p:cNvPr id="100019" name="TextBox 2"/>
+          <p:cNvPr id="100024" name="TextBox 2"/>
           <p:cNvSpPr txBox="1"/>
           <p:nvPr/>
         </p:nvSpPr>
@@ -2098,7 +2495,7 @@
       </p:sp>
       <p:graphicFrame>
         <p:nvGraphicFramePr>
-          <p:cNvPr id="100020" name="Table 1"/>
+          <p:cNvPr id="100025" name="Table 1"/>
           <p:cNvGraphicFramePr/>
           <p:nvPr/>
         </p:nvGraphicFramePr>
@@ -2405,7 +2802,7 @@
       </p:graphicFrame>
       <p:sp>
         <p:nvSpPr>
-          <p:cNvPr id="100021" name="TextBox 3"/>
+          <p:cNvPr id="100026" name="TextBox 3"/>
           <p:cNvSpPr txBox="1"/>
           <p:nvPr/>
         </p:nvSpPr>
@@ -2440,7 +2837,7 @@
 </p:sld>
 </file>
 
-<file path=ppt/slides/slide7.xml><?xml version="1.0" encoding="utf-8"?>
+<file path=ppt/slides/slide8.xml><?xml version="1.0" encoding="utf-8"?>
 <p:sld xmlns:p="http://schemas.openxmlformats.org/presentationml/2006/main">
   <p:cSld name="Decision &amp; ask">
     <p:bg>
@@ -2459,7 +2856,7 @@
       <p:grpSpPr/>
       <p:sp>
         <p:nvSpPr>
-          <p:cNvPr id="100022" name="TextBox 1"/>
+          <p:cNvPr id="100027" name="TextBox 1"/>
           <p:cNvSpPr txBox="1"/>
           <p:nvPr/>
         </p:nvSpPr>
@@ -2491,7 +2888,7 @@
       </p:sp>
       <p:sp>
         <p:nvSpPr>
-          <p:cNvPr id="100023" name="TextBox 2"/>
+          <p:cNvPr id="100028" name="TextBox 2"/>
           <p:cNvSpPr txBox="1"/>
           <p:nvPr/>
         </p:nvSpPr>
@@ -2523,7 +2920,7 @@
       </p:sp>
       <p:sp>
         <p:nvSpPr>
-          <p:cNvPr id="100024" name="TextBox 3"/>
+          <p:cNvPr id="100029" name="TextBox 3"/>
           <p:cNvSpPr txBox="1"/>
           <p:nvPr/>
         </p:nvSpPr>
@@ -2582,7 +2979,7 @@
       </p:sp>
       <p:sp>
         <p:nvSpPr>
-          <p:cNvPr id="100025" name="TextBox 4"/>
+          <p:cNvPr id="100030" name="TextBox 4"/>
           <p:cNvSpPr txBox="1"/>
           <p:nvPr/>
         </p:nvSpPr>

--- a/skills/presentations/assets/pptx/examples/03-management-effectiveness.pptx
+++ b/skills/presentations/assets/pptx/examples/03-management-effectiveness.pptx
@@ -5,17 +5,18 @@
     <p:sldMasterId xmlns:r="http://schemas.openxmlformats.org/officeDocument/2006/relationships" id="2147483648" r:id="rId1"/>
   </p:sldMasterIdLst>
   <p:notesMasterIdLst>
-    <p:notesMasterId r:id="Re1e9aea9bc754d45"/>
+    <p:notesMasterId r:id="R7baf62c7e682428b"/>
   </p:notesMasterIdLst>
   <p:sldIdLst>
-    <p:sldId id="256" r:id="R976dc0bb3fdb4251"/>
-    <p:sldId id="257" r:id="R267ebb1719e7463c"/>
-    <p:sldId id="258" r:id="R800de08268994a4f"/>
-    <p:sldId id="259" r:id="Re23b9ff8f1d74d8e"/>
-    <p:sldId id="260" r:id="R6410bdc44fc64020"/>
-    <p:sldId id="261" r:id="R53af8803974e4da7"/>
-    <p:sldId id="262" r:id="Rc5c90a10674946cd"/>
-    <p:sldId id="263" r:id="R0164d881c694496b"/>
+    <p:sldId id="256" r:id="R624f404d2b6c4da6"/>
+    <p:sldId id="257" r:id="R7c400b6646d946f9"/>
+    <p:sldId id="258" r:id="R1cbadd52582947c8"/>
+    <p:sldId id="259" r:id="R77f3858820074092"/>
+    <p:sldId id="260" r:id="R167a8e21a0894370"/>
+    <p:sldId id="261" r:id="Re4341c253213442c"/>
+    <p:sldId id="262" r:id="Rafc9b948c34b4d6b"/>
+    <p:sldId id="263" r:id="R46acfc8d49b74ee7"/>
+    <p:sldId id="264" r:id="R00a59dd92bfb43be"/>
   </p:sldIdLst>
   <p:sldSz cx="12192000" cy="6858000"/>
   <p:notesSz cx="6858000" cy="9144000"/>
@@ -624,7 +625,7 @@
           <a:p xmlns:a="http://schemas.openxmlformats.org/drawingml/2006/main">
             <a:r>
               <a:rPr lang="en-US"/>
-              <a:t>One ask; point to deck 06 for business case.</a:t>
+              <a:t>Agent/human: answer who/stakes/decision from this slide alone. Recommend=Endorse hire path + air cover; do not wait for red attrition. by 2026-05-18 1:1.</a:t>
             </a:r>
           </a:p>
         </p:txBody>
@@ -679,7 +680,7 @@
           <a:p xmlns:a="http://schemas.openxmlformats.org/drawingml/2006/main">
             <a:r>
               <a:rPr lang="en-US"/>
-              <a:t>Honest partial on USB3.</a:t>
+              <a:t>One ask; point to deck 06 for business case.</a:t>
             </a:r>
           </a:p>
         </p:txBody>
@@ -734,7 +735,7 @@
           <a:p xmlns:a="http://schemas.openxmlformats.org/drawingml/2006/main">
             <a:r>
               <a:rPr lang="en-US"/>
-              <a:t>Explain A vs planned; HC uses B in deck 06.</a:t>
+              <a:t>Honest partial on USB3.</a:t>
             </a:r>
           </a:p>
         </p:txBody>
@@ -789,7 +790,7 @@
           <a:p xmlns:a="http://schemas.openxmlformats.org/drawingml/2006/main">
             <a:r>
               <a:rPr lang="en-US"/>
-              <a:t>Facts + ask, no blame.</a:t>
+              <a:t>Explain A vs planned; HC uses B in deck 06.</a:t>
             </a:r>
           </a:p>
         </p:txBody>
@@ -844,7 +845,7 @@
           <a:p xmlns:a="http://schemas.openxmlformats.org/drawingml/2006/main">
             <a:r>
               <a:rPr lang="en-US"/>
-              <a:t>Walk trade-offs; land recommendation.</a:t>
+              <a:t>Facts + ask, no blame.</a:t>
             </a:r>
           </a:p>
         </p:txBody>
@@ -858,6 +859,61 @@
 </file>
 
 <file path=ppt/notesSlides/notesSlide8.xml><?xml version="1.0" encoding="utf-8"?>
+<p:notes xmlns:p="http://schemas.openxmlformats.org/presentationml/2006/main">
+  <p:cSld>
+    <p:spTree>
+      <p:nvGrpSpPr>
+        <p:cNvPr id="1" name=""/>
+        <p:cNvGrpSpPr/>
+        <p:nvPr/>
+      </p:nvGrpSpPr>
+      <p:grpSpPr>
+        <a:xfrm xmlns:a="http://schemas.openxmlformats.org/drawingml/2006/main"/>
+      </p:grpSpPr>
+      <p:sp>
+        <p:nvSpPr>
+          <p:cNvPr id="2" name="Slide Image Placeholder 1"/>
+          <p:cNvSpPr/>
+          <p:nvPr>
+            <p:ph type="sldImg" idx="0"/>
+          </p:nvPr>
+        </p:nvSpPr>
+        <p:spPr/>
+        <p:txBody>
+          <a:bodyPr xmlns:a="http://schemas.openxmlformats.org/drawingml/2006/main"/>
+          <a:lstStyle xmlns:a="http://schemas.openxmlformats.org/drawingml/2006/main"/>
+          <a:p xmlns:a="http://schemas.openxmlformats.org/drawingml/2006/main"/>
+        </p:txBody>
+      </p:sp>
+      <p:sp>
+        <p:nvSpPr>
+          <p:cNvPr id="3" name="Notes Placeholder 2"/>
+          <p:cNvSpPr/>
+          <p:nvPr>
+            <p:ph type="body" idx="1"/>
+          </p:nvPr>
+        </p:nvSpPr>
+        <p:spPr/>
+        <p:txBody>
+          <a:bodyPr xmlns:a="http://schemas.openxmlformats.org/drawingml/2006/main"/>
+          <a:lstStyle xmlns:a="http://schemas.openxmlformats.org/drawingml/2006/main"/>
+          <a:p xmlns:a="http://schemas.openxmlformats.org/drawingml/2006/main">
+            <a:r>
+              <a:rPr lang="en-US"/>
+              <a:t>Walk trade-offs; land recommendation.</a:t>
+            </a:r>
+          </a:p>
+        </p:txBody>
+      </p:sp>
+    </p:spTree>
+  </p:cSld>
+  <p:clrMapOvr>
+    <a:masterClrMapping xmlns:a="http://schemas.openxmlformats.org/drawingml/2006/main"/>
+  </p:clrMapOvr>
+</p:notes>
+</file>
+
+<file path=ppt/notesSlides/notesSlide9.xml><?xml version="1.0" encoding="utf-8"?>
 <p:notes xmlns:p="http://schemas.openxmlformats.org/presentationml/2006/main">
   <p:cSld>
     <p:spTree>
@@ -1659,6 +1715,387 @@
 
 <file path=ppt/slides/slide3.xml><?xml version="1.0" encoding="utf-8"?>
 <p:sld xmlns:p="http://schemas.openxmlformats.org/presentationml/2006/main">
+  <p:cSld name="Situation &amp; decision card">
+    <p:bg>
+      <p:bgPr>
+        <a:solidFill xmlns:a="http://schemas.openxmlformats.org/drawingml/2006/main">
+          <a:srgbClr val="F4F7FC"/>
+        </a:solidFill>
+      </p:bgPr>
+    </p:bg>
+    <p:spTree>
+      <p:nvGrpSpPr>
+        <p:cNvPr id="1" name=""/>
+        <p:cNvGrpSpPr/>
+        <p:nvPr/>
+      </p:nvGrpSpPr>
+      <p:grpSpPr/>
+      <p:sp>
+        <p:nvSpPr>
+          <p:cNvPr id="100009" name="TextBox 1"/>
+          <p:cNvSpPr txBox="1"/>
+          <p:nvPr/>
+        </p:nvSpPr>
+        <p:spPr>
+          <a:xfrm xmlns:a="http://schemas.openxmlformats.org/drawingml/2006/main">
+            <a:off x="504000" y="270000"/>
+            <a:ext cx="11088000" cy="270000"/>
+          </a:xfrm>
+          <a:prstGeom xmlns:a="http://schemas.openxmlformats.org/drawingml/2006/main" prst="rect">
+            <a:avLst/>
+          </a:prstGeom>
+        </p:spPr>
+        <p:txBody>
+          <a:bodyPr xmlns:a="http://schemas.openxmlformats.org/drawingml/2006/main"/>
+          <a:lstStyle xmlns:a="http://schemas.openxmlformats.org/drawingml/2006/main"/>
+          <a:p xmlns:a="http://schemas.openxmlformats.org/drawingml/2006/main">
+            <a:r>
+              <a:rPr lang="en-US" sz="1100" b="1">
+                <a:solidFill>
+                  <a:srgbClr val="2B6CB0"/>
+                </a:solidFill>
+                <a:latin typeface="Calibri"/>
+                <a:ea typeface="Calibri"/>
+              </a:rPr>
+              <a:t>READ THIS BEFORE THE DETAILS</a:t>
+            </a:r>
+          </a:p>
+        </p:txBody>
+      </p:sp>
+      <p:sp>
+        <p:nvSpPr>
+          <p:cNvPr id="100010" name="TextBox 2"/>
+          <p:cNvSpPr txBox="1"/>
+          <p:nvPr/>
+        </p:nvSpPr>
+        <p:spPr>
+          <a:xfrm xmlns:a="http://schemas.openxmlformats.org/drawingml/2006/main">
+            <a:off x="504000" y="558000"/>
+            <a:ext cx="11088000" cy="612000"/>
+          </a:xfrm>
+          <a:prstGeom xmlns:a="http://schemas.openxmlformats.org/drawingml/2006/main" prst="rect">
+            <a:avLst/>
+          </a:prstGeom>
+        </p:spPr>
+        <p:txBody>
+          <a:bodyPr xmlns:a="http://schemas.openxmlformats.org/drawingml/2006/main"/>
+          <a:lstStyle xmlns:a="http://schemas.openxmlformats.org/drawingml/2006/main"/>
+          <a:p xmlns:a="http://schemas.openxmlformats.org/drawingml/2006/main">
+            <a:r>
+              <a:rPr lang="en-US" sz="2800" b="1">
+                <a:solidFill>
+                  <a:srgbClr val="1A202C"/>
+                </a:solidFill>
+                <a:latin typeface="Calibri"/>
+                <a:ea typeface="Calibri"/>
+              </a:rPr>
+              <a:t>Situation &amp; decision card</a:t>
+            </a:r>
+          </a:p>
+        </p:txBody>
+      </p:sp>
+      <p:sp>
+        <p:nvSpPr>
+          <p:cNvPr id="100011" name="TextBox 3"/>
+          <p:cNvSpPr txBox="1"/>
+          <p:nvPr/>
+        </p:nvSpPr>
+        <p:spPr>
+          <a:xfrm xmlns:a="http://schemas.openxmlformats.org/drawingml/2006/main">
+            <a:off x="504000" y="1224000"/>
+            <a:ext cx="11088000" cy="4968000"/>
+          </a:xfrm>
+          <a:prstGeom xmlns:a="http://schemas.openxmlformats.org/drawingml/2006/main" prst="rect">
+            <a:avLst/>
+          </a:prstGeom>
+          <a:solidFill xmlns:a="http://schemas.openxmlformats.org/drawingml/2006/main">
+            <a:srgbClr val="FFFFFF"/>
+          </a:solidFill>
+        </p:spPr>
+        <p:txBody>
+          <a:bodyPr xmlns:a="http://schemas.openxmlformats.org/drawingml/2006/main"/>
+          <a:lstStyle xmlns:a="http://schemas.openxmlformats.org/drawingml/2006/main"/>
+          <a:p xmlns:a="http://schemas.openxmlformats.org/drawingml/2006/main">
+            <a:r>
+              <a:rPr lang="en-US" sz="1300" b="0">
+                <a:solidFill>
+                  <a:srgbClr val="1A202C"/>
+                </a:solidFill>
+                <a:latin typeface="Calibri"/>
+                <a:ea typeface="Calibri"/>
+              </a:rPr>
+              <a:t>Presenter: Alex Chen — EM, Atlas (1:1 with manager)</a:t>
+            </a:r>
+          </a:p>
+          <a:p xmlns:a="http://schemas.openxmlformats.org/drawingml/2006/main">
+            <a:r>
+              <a:rPr lang="en-US" sz="1300" b="0">
+                <a:solidFill>
+                  <a:srgbClr val="1A202C"/>
+                </a:solidFill>
+                <a:latin typeface="Calibri"/>
+                <a:ea typeface="Calibri"/>
+              </a:rPr>
+              <a:t>Decision-maker: Morgan Lee — VP Eng (endorse hire path + air cover)</a:t>
+            </a:r>
+          </a:p>
+          <a:p xmlns:a="http://schemas.openxmlformats.org/drawingml/2006/main">
+            <a:r>
+              <a:rPr lang="en-US" sz="1300" b="0">
+                <a:solidFill>
+                  <a:srgbClr val="1A202C"/>
+                </a:solidFill>
+                <a:latin typeface="Calibri"/>
+                <a:ea typeface="Calibri"/>
+              </a:rPr>
+              <a:t>Audience: Manager 1:1 (not full staff meeting)</a:t>
+            </a:r>
+          </a:p>
+          <a:p xmlns:a="http://schemas.openxmlformats.org/drawingml/2006/main">
+            <a:r>
+              <a:rPr lang="en-US" sz="1300" b="0">
+                <a:solidFill>
+                  <a:srgbClr val="1A202C"/>
+                </a:solidFill>
+                <a:latin typeface="Calibri"/>
+                <a:ea typeface="Calibri"/>
+              </a:rPr>
+              <a:t/>
+            </a:r>
+          </a:p>
+          <a:p xmlns:a="http://schemas.openxmlformats.org/drawingml/2006/main">
+            <a:r>
+              <a:rPr lang="en-US" sz="1300" b="0">
+                <a:solidFill>
+                  <a:srgbClr val="1A202C"/>
+                </a:solidFill>
+                <a:latin typeface="Calibri"/>
+                <a:ea typeface="Calibri"/>
+              </a:rPr>
+              <a:t>What just happened / context:</a:t>
+            </a:r>
+          </a:p>
+          <a:p xmlns:a="http://schemas.openxmlformats.org/drawingml/2006/main">
+            <a:r>
+              <a:rPr lang="en-US" sz="1300" b="0">
+                <a:solidFill>
+                  <a:srgbClr val="1A202C"/>
+                </a:solidFill>
+                <a:latin typeface="Calibri"/>
+                <a:ea typeface="Calibri"/>
+              </a:rPr>
+              <a:t>Q2 delivery is GREEN (freeze, day-3 boot) but people are YELLOW: Priya is single-threaded on HS IO DV; unplanned work hit ~20% vs 10–15% plan; USB3 only partial.</a:t>
+            </a:r>
+          </a:p>
+          <a:p xmlns:a="http://schemas.openxmlformats.org/drawingml/2006/main">
+            <a:r>
+              <a:rPr lang="en-US" sz="1300" b="0">
+                <a:solidFill>
+                  <a:srgbClr val="1A202C"/>
+                </a:solidFill>
+                <a:latin typeface="Calibri"/>
+                <a:ea typeface="Calibri"/>
+              </a:rPr>
+              <a:t/>
+            </a:r>
+          </a:p>
+          <a:p xmlns:a="http://schemas.openxmlformats.org/drawingml/2006/main">
+            <a:r>
+              <a:rPr lang="en-US" sz="1300" b="0">
+                <a:solidFill>
+                  <a:srgbClr val="1A202C"/>
+                </a:solidFill>
+                <a:latin typeface="Calibri"/>
+                <a:ea typeface="Calibri"/>
+              </a:rPr>
+              <a:t>Stakes if we get this wrong:</a:t>
+            </a:r>
+          </a:p>
+          <a:p xmlns:a="http://schemas.openxmlformats.org/drawingml/2006/main">
+            <a:r>
+              <a:rPr lang="en-US" sz="1300" b="0">
+                <a:solidFill>
+                  <a:srgbClr val="1A202C"/>
+                </a:solidFill>
+                <a:latin typeface="Calibri"/>
+                <a:ea typeface="Calibri"/>
+              </a:rPr>
+              <a:t>Without senior backup, sample surge + USB3 + burnout risk; Morgan may only hear good silicon news and under-invest in capacity.</a:t>
+            </a:r>
+          </a:p>
+          <a:p xmlns:a="http://schemas.openxmlformats.org/drawingml/2006/main">
+            <a:r>
+              <a:rPr lang="en-US" sz="1300" b="0">
+                <a:solidFill>
+                  <a:srgbClr val="1A202C"/>
+                </a:solidFill>
+                <a:latin typeface="Calibri"/>
+                <a:ea typeface="Calibri"/>
+              </a:rPr>
+              <a:t/>
+            </a:r>
+          </a:p>
+          <a:p xmlns:a="http://schemas.openxmlformats.org/drawingml/2006/main">
+            <a:r>
+              <a:rPr lang="en-US" sz="1300" b="0">
+                <a:solidFill>
+                  <a:srgbClr val="1A202C"/>
+                </a:solidFill>
+                <a:latin typeface="Calibri"/>
+                <a:ea typeface="Calibri"/>
+              </a:rPr>
+              <a:t>Decision needed:</a:t>
+            </a:r>
+          </a:p>
+          <a:p xmlns:a="http://schemas.openxmlformats.org/drawingml/2006/main">
+            <a:r>
+              <a:rPr lang="en-US" sz="1300" b="0">
+                <a:solidFill>
+                  <a:srgbClr val="1A202C"/>
+                </a:solidFill>
+                <a:latin typeface="Calibri"/>
+                <a:ea typeface="Calibri"/>
+              </a:rPr>
+              <a:t>Endorse opening +1 senior DV req (detail in deck 06) and restate sample priority in steering.</a:t>
+            </a:r>
+          </a:p>
+          <a:p xmlns:a="http://schemas.openxmlformats.org/drawingml/2006/main">
+            <a:r>
+              <a:rPr lang="en-US" sz="1300" b="0">
+                <a:solidFill>
+                  <a:srgbClr val="1A202C"/>
+                </a:solidFill>
+                <a:latin typeface="Calibri"/>
+                <a:ea typeface="Calibri"/>
+              </a:rPr>
+              <a:t/>
+            </a:r>
+          </a:p>
+          <a:p xmlns:a="http://schemas.openxmlformats.org/drawingml/2006/main">
+            <a:r>
+              <a:rPr lang="en-US" sz="1300" b="0">
+                <a:solidFill>
+                  <a:srgbClr val="1A202C"/>
+                </a:solidFill>
+                <a:latin typeface="Calibri"/>
+                <a:ea typeface="Calibri"/>
+              </a:rPr>
+              <a:t>Recommendation: Endorse hire path + air cover; do not wait for red attrition.</a:t>
+            </a:r>
+          </a:p>
+          <a:p xmlns:a="http://schemas.openxmlformats.org/drawingml/2006/main">
+            <a:r>
+              <a:rPr lang="en-US" sz="1300" b="0">
+                <a:solidFill>
+                  <a:srgbClr val="1A202C"/>
+                </a:solidFill>
+                <a:latin typeface="Calibri"/>
+                <a:ea typeface="Calibri"/>
+              </a:rPr>
+              <a:t>If YES: Req opens ~5/22; people risk can return to green in H2.</a:t>
+            </a:r>
+          </a:p>
+          <a:p xmlns:a="http://schemas.openxmlformats.org/drawingml/2006/main">
+            <a:r>
+              <a:rPr lang="en-US" sz="1300" b="0">
+                <a:solidFill>
+                  <a:srgbClr val="1A202C"/>
+                </a:solidFill>
+                <a:latin typeface="Calibri"/>
+                <a:ea typeface="Calibri"/>
+              </a:rPr>
+              <a:t>If NO / delay: People stay yellow; USB3 and sample polish compete for one senior.</a:t>
+            </a:r>
+          </a:p>
+          <a:p xmlns:a="http://schemas.openxmlformats.org/drawingml/2006/main">
+            <a:r>
+              <a:rPr lang="en-US" sz="1300" b="0">
+                <a:solidFill>
+                  <a:srgbClr val="1A202C"/>
+                </a:solidFill>
+                <a:latin typeface="Calibri"/>
+                <a:ea typeface="Calibri"/>
+              </a:rPr>
+              <a:t/>
+            </a:r>
+          </a:p>
+          <a:p xmlns:a="http://schemas.openxmlformats.org/drawingml/2006/main">
+            <a:r>
+              <a:rPr lang="en-US" sz="1300" b="0">
+                <a:solidFill>
+                  <a:srgbClr val="1A202C"/>
+                </a:solidFill>
+                <a:latin typeface="Calibri"/>
+                <a:ea typeface="Calibri"/>
+              </a:rPr>
+              <a:t>Decide by: 2026-05-18 1:1</a:t>
+            </a:r>
+          </a:p>
+          <a:p xmlns:a="http://schemas.openxmlformats.org/drawingml/2006/main">
+            <a:r>
+              <a:rPr lang="en-US" sz="1300" b="0">
+                <a:solidFill>
+                  <a:srgbClr val="1A202C"/>
+                </a:solidFill>
+                <a:latin typeface="Calibri"/>
+                <a:ea typeface="Calibri"/>
+              </a:rPr>
+              <a:t>Arc prior: 02 first-silicon green just landed</a:t>
+            </a:r>
+          </a:p>
+          <a:p xmlns:a="http://schemas.openxmlformats.org/drawingml/2006/main">
+            <a:r>
+              <a:rPr lang="en-US" sz="1300" b="0">
+                <a:solidFill>
+                  <a:srgbClr val="1A202C"/>
+                </a:solidFill>
+                <a:latin typeface="Calibri"/>
+                <a:ea typeface="Calibri"/>
+              </a:rPr>
+              <a:t>Arc next: 06 formal HC business case same week</a:t>
+            </a:r>
+          </a:p>
+        </p:txBody>
+      </p:sp>
+      <p:sp>
+        <p:nvSpPr>
+          <p:cNvPr id="100012" name="TextBox 4"/>
+          <p:cNvSpPr txBox="1"/>
+          <p:nvPr/>
+        </p:nvSpPr>
+        <p:spPr>
+          <a:xfrm xmlns:a="http://schemas.openxmlformats.org/drawingml/2006/main">
+            <a:off x="504000" y="6426000"/>
+            <a:ext cx="11088000" cy="306000"/>
+          </a:xfrm>
+          <a:prstGeom xmlns:a="http://schemas.openxmlformats.org/drawingml/2006/main" prst="rect">
+            <a:avLst/>
+          </a:prstGeom>
+        </p:spPr>
+        <p:txBody>
+          <a:bodyPr xmlns:a="http://schemas.openxmlformats.org/drawingml/2006/main"/>
+          <a:lstStyle xmlns:a="http://schemas.openxmlformats.org/drawingml/2006/main"/>
+          <a:p xmlns:a="http://schemas.openxmlformats.org/drawingml/2006/main">
+            <a:r>
+              <a:rPr lang="en-US" sz="1100" b="0">
+                <a:solidFill>
+                  <a:srgbClr val="718096"/>
+                </a:solidFill>
+                <a:latin typeface="Calibri"/>
+                <a:ea typeface="Calibri"/>
+              </a:rPr>
+              <a:t>Atlas Platform  ·  Project Aurora  ·  NovaSemi  ·  2026</a:t>
+            </a:r>
+          </a:p>
+        </p:txBody>
+      </p:sp>
+    </p:spTree>
+  </p:cSld>
+</p:sld>
+</file>
+
+<file path=ppt/slides/slide4.xml><?xml version="1.0" encoding="utf-8"?>
+<p:sld xmlns:p="http://schemas.openxmlformats.org/presentationml/2006/main">
   <p:cSld name="BLUF — delivery green, capacity tight">
     <p:bg>
       <p:bgPr>
@@ -1676,7 +2113,7 @@
       <p:grpSpPr/>
       <p:sp>
         <p:nvSpPr>
-          <p:cNvPr id="100009" name="TextBox 1"/>
+          <p:cNvPr id="100013" name="TextBox 1"/>
           <p:cNvSpPr txBox="1"/>
           <p:nvPr/>
         </p:nvSpPr>
@@ -1708,7 +2145,7 @@
       </p:sp>
       <p:sp>
         <p:nvSpPr>
-          <p:cNvPr id="100010" name="TextBox 2"/>
+          <p:cNvPr id="100014" name="TextBox 2"/>
           <p:cNvSpPr txBox="1"/>
           <p:nvPr/>
         </p:nvSpPr>
@@ -1740,7 +2177,7 @@
       </p:sp>
       <p:sp>
         <p:nvSpPr>
-          <p:cNvPr id="100011" name="TextBox 3"/>
+          <p:cNvPr id="100015" name="TextBox 3"/>
           <p:cNvSpPr txBox="1"/>
           <p:nvPr/>
         </p:nvSpPr>
@@ -1775,7 +2212,7 @@
       </p:sp>
       <p:sp>
         <p:nvSpPr>
-          <p:cNvPr id="100012" name="TextBox 4"/>
+          <p:cNvPr id="100016" name="TextBox 4"/>
           <p:cNvSpPr txBox="1"/>
           <p:nvPr/>
         </p:nvSpPr>
@@ -1858,7 +2295,7 @@
       </p:sp>
       <p:sp>
         <p:nvSpPr>
-          <p:cNvPr id="100013" name="TextBox 5"/>
+          <p:cNvPr id="100017" name="TextBox 5"/>
           <p:cNvSpPr txBox="1"/>
           <p:nvPr/>
         </p:nvSpPr>
@@ -1893,7 +2330,7 @@
 </p:sld>
 </file>
 
-<file path=ppt/slides/slide4.xml><?xml version="1.0" encoding="utf-8"?>
+<file path=ppt/slides/slide5.xml><?xml version="1.0" encoding="utf-8"?>
 <p:sld xmlns:p="http://schemas.openxmlformats.org/presentationml/2006/main">
   <p:cSld name="Outcomes vs commits">
     <p:bg>
@@ -1912,7 +2349,7 @@
       <p:grpSpPr/>
       <p:sp>
         <p:nvSpPr>
-          <p:cNvPr id="100014" name="TextBox 1"/>
+          <p:cNvPr id="100018" name="TextBox 1"/>
           <p:cNvSpPr txBox="1"/>
           <p:nvPr/>
         </p:nvSpPr>
@@ -1944,7 +2381,7 @@
       </p:sp>
       <p:sp>
         <p:nvSpPr>
-          <p:cNvPr id="100015" name="TextBox 2"/>
+          <p:cNvPr id="100019" name="TextBox 2"/>
           <p:cNvSpPr txBox="1"/>
           <p:nvPr/>
         </p:nvSpPr>
@@ -2027,7 +2464,7 @@
       </p:sp>
       <p:sp>
         <p:nvSpPr>
-          <p:cNvPr id="100016" name="TextBox 3"/>
+          <p:cNvPr id="100020" name="TextBox 3"/>
           <p:cNvSpPr txBox="1"/>
           <p:nvPr/>
         </p:nvSpPr>
@@ -2062,7 +2499,7 @@
 </p:sld>
 </file>
 
-<file path=ppt/slides/slide5.xml><?xml version="1.0" encoding="utf-8"?>
+<file path=ppt/slides/slide6.xml><?xml version="1.0" encoding="utf-8"?>
 <p:sld xmlns:p="http://schemas.openxmlformats.org/presentationml/2006/main">
   <p:cSld name="Capacity reality (context A)">
     <p:bg>
@@ -2081,7 +2518,7 @@
       <p:grpSpPr/>
       <p:sp>
         <p:nvSpPr>
-          <p:cNvPr id="100017" name="TextBox 1"/>
+          <p:cNvPr id="100021" name="TextBox 1"/>
           <p:cNvSpPr txBox="1"/>
           <p:nvPr/>
         </p:nvSpPr>
@@ -2113,7 +2550,7 @@
       </p:sp>
       <p:sp>
         <p:nvSpPr>
-          <p:cNvPr id="100018" name="TextBox 2"/>
+          <p:cNvPr id="100022" name="TextBox 2"/>
           <p:cNvSpPr txBox="1"/>
           <p:nvPr/>
         </p:nvSpPr>
@@ -2208,7 +2645,7 @@
       </p:sp>
       <p:sp>
         <p:nvSpPr>
-          <p:cNvPr id="100019" name="TextBox 3"/>
+          <p:cNvPr id="100023" name="TextBox 3"/>
           <p:cNvSpPr txBox="1"/>
           <p:nvPr/>
         </p:nvSpPr>
@@ -2243,7 +2680,7 @@
 </p:sld>
 </file>
 
-<file path=ppt/slides/slide6.xml><?xml version="1.0" encoding="utf-8"?>
+<file path=ppt/slides/slide7.xml><?xml version="1.0" encoding="utf-8"?>
 <p:sld xmlns:p="http://schemas.openxmlformats.org/presentationml/2006/main">
   <p:cSld name="People &amp; capability">
     <p:bg>
@@ -2262,7 +2699,7 @@
       <p:grpSpPr/>
       <p:sp>
         <p:nvSpPr>
-          <p:cNvPr id="100020" name="TextBox 1"/>
+          <p:cNvPr id="100024" name="TextBox 1"/>
           <p:cNvSpPr txBox="1"/>
           <p:nvPr/>
         </p:nvSpPr>
@@ -2294,7 +2731,7 @@
       </p:sp>
       <p:sp>
         <p:nvSpPr>
-          <p:cNvPr id="100021" name="TextBox 2"/>
+          <p:cNvPr id="100025" name="TextBox 2"/>
           <p:cNvSpPr txBox="1"/>
           <p:nvPr/>
         </p:nvSpPr>
@@ -2377,7 +2814,7 @@
       </p:sp>
       <p:sp>
         <p:nvSpPr>
-          <p:cNvPr id="100022" name="TextBox 3"/>
+          <p:cNvPr id="100026" name="TextBox 3"/>
           <p:cNvSpPr txBox="1"/>
           <p:nvPr/>
         </p:nvSpPr>
@@ -2412,7 +2849,7 @@
 </p:sld>
 </file>
 
-<file path=ppt/slides/slide7.xml><?xml version="1.0" encoding="utf-8"?>
+<file path=ppt/slides/slide8.xml><?xml version="1.0" encoding="utf-8"?>
 <p:sld xmlns:p="http://schemas.openxmlformats.org/presentationml/2006/main">
   <p:cSld name="Options &amp; recommendation">
     <p:bg>
@@ -2431,7 +2868,7 @@
       <p:grpSpPr/>
       <p:sp>
         <p:nvSpPr>
-          <p:cNvPr id="100023" name="TextBox 1"/>
+          <p:cNvPr id="100027" name="TextBox 1"/>
           <p:cNvSpPr txBox="1"/>
           <p:nvPr/>
         </p:nvSpPr>
@@ -2463,7 +2900,7 @@
       </p:sp>
       <p:sp>
         <p:nvSpPr>
-          <p:cNvPr id="100024" name="TextBox 2"/>
+          <p:cNvPr id="100028" name="TextBox 2"/>
           <p:cNvSpPr txBox="1"/>
           <p:nvPr/>
         </p:nvSpPr>
@@ -2495,7 +2932,7 @@
       </p:sp>
       <p:graphicFrame>
         <p:nvGraphicFramePr>
-          <p:cNvPr id="100025" name="Table 1"/>
+          <p:cNvPr id="100029" name="Table 1"/>
           <p:cNvGraphicFramePr/>
           <p:nvPr/>
         </p:nvGraphicFramePr>
@@ -2802,7 +3239,7 @@
       </p:graphicFrame>
       <p:sp>
         <p:nvSpPr>
-          <p:cNvPr id="100026" name="TextBox 3"/>
+          <p:cNvPr id="100030" name="TextBox 3"/>
           <p:cNvSpPr txBox="1"/>
           <p:nvPr/>
         </p:nvSpPr>
@@ -2837,7 +3274,7 @@
 </p:sld>
 </file>
 
-<file path=ppt/slides/slide8.xml><?xml version="1.0" encoding="utf-8"?>
+<file path=ppt/slides/slide9.xml><?xml version="1.0" encoding="utf-8"?>
 <p:sld xmlns:p="http://schemas.openxmlformats.org/presentationml/2006/main">
   <p:cSld name="Decision &amp; ask">
     <p:bg>
@@ -2856,7 +3293,7 @@
       <p:grpSpPr/>
       <p:sp>
         <p:nvSpPr>
-          <p:cNvPr id="100027" name="TextBox 1"/>
+          <p:cNvPr id="100031" name="TextBox 1"/>
           <p:cNvSpPr txBox="1"/>
           <p:nvPr/>
         </p:nvSpPr>
@@ -2888,7 +3325,7 @@
       </p:sp>
       <p:sp>
         <p:nvSpPr>
-          <p:cNvPr id="100028" name="TextBox 2"/>
+          <p:cNvPr id="100032" name="TextBox 2"/>
           <p:cNvSpPr txBox="1"/>
           <p:nvPr/>
         </p:nvSpPr>
@@ -2920,7 +3357,7 @@
       </p:sp>
       <p:sp>
         <p:nvSpPr>
-          <p:cNvPr id="100029" name="TextBox 3"/>
+          <p:cNvPr id="100033" name="TextBox 3"/>
           <p:cNvSpPr txBox="1"/>
           <p:nvPr/>
         </p:nvSpPr>
@@ -2979,7 +3416,7 @@
       </p:sp>
       <p:sp>
         <p:nvSpPr>
-          <p:cNvPr id="100030" name="TextBox 4"/>
+          <p:cNvPr id="100034" name="TextBox 4"/>
           <p:cNvSpPr txBox="1"/>
           <p:nvPr/>
         </p:nvSpPr>

--- a/skills/presentations/assets/pptx/examples/03-management-effectiveness.pptx
+++ b/skills/presentations/assets/pptx/examples/03-management-effectiveness.pptx
@@ -5,18 +5,18 @@
     <p:sldMasterId xmlns:r="http://schemas.openxmlformats.org/officeDocument/2006/relationships" id="2147483648" r:id="rId1"/>
   </p:sldMasterIdLst>
   <p:notesMasterIdLst>
-    <p:notesMasterId r:id="R7baf62c7e682428b"/>
+    <p:notesMasterId r:id="R216be8624522462c"/>
   </p:notesMasterIdLst>
   <p:sldIdLst>
-    <p:sldId id="256" r:id="R624f404d2b6c4da6"/>
-    <p:sldId id="257" r:id="R7c400b6646d946f9"/>
-    <p:sldId id="258" r:id="R1cbadd52582947c8"/>
-    <p:sldId id="259" r:id="R77f3858820074092"/>
-    <p:sldId id="260" r:id="R167a8e21a0894370"/>
-    <p:sldId id="261" r:id="Re4341c253213442c"/>
-    <p:sldId id="262" r:id="Rafc9b948c34b4d6b"/>
-    <p:sldId id="263" r:id="R46acfc8d49b74ee7"/>
-    <p:sldId id="264" r:id="R00a59dd92bfb43be"/>
+    <p:sldId id="256" r:id="Ra2956c54500a41c4"/>
+    <p:sldId id="257" r:id="Re048aa5bc68541b4"/>
+    <p:sldId id="258" r:id="Ra7b8c06c60f747a0"/>
+    <p:sldId id="259" r:id="R02039e78b6574e6f"/>
+    <p:sldId id="260" r:id="R9c72c5f556dc4060"/>
+    <p:sldId id="261" r:id="R17376963fbea4737"/>
+    <p:sldId id="262" r:id="R4e4bd5b85fca4094"/>
+    <p:sldId id="263" r:id="Rc88f61daf41a4bb9"/>
+    <p:sldId id="264" r:id="R4657d91987d34011"/>
   </p:sldIdLst>
   <p:sldSz cx="12192000" cy="6858000"/>
   <p:notesSz cx="6858000" cy="9144000"/>

--- a/skills/presentations/assets/pptx/examples/03-management-effectiveness.pptx
+++ b/skills/presentations/assets/pptx/examples/03-management-effectiveness.pptx
@@ -5,18 +5,18 @@
     <p:sldMasterId xmlns:r="http://schemas.openxmlformats.org/officeDocument/2006/relationships" id="2147483648" r:id="rId1"/>
   </p:sldMasterIdLst>
   <p:notesMasterIdLst>
-    <p:notesMasterId r:id="R216be8624522462c"/>
+    <p:notesMasterId r:id="R8394b5ebc6364fcc"/>
   </p:notesMasterIdLst>
   <p:sldIdLst>
-    <p:sldId id="256" r:id="Ra2956c54500a41c4"/>
-    <p:sldId id="257" r:id="Re048aa5bc68541b4"/>
-    <p:sldId id="258" r:id="Ra7b8c06c60f747a0"/>
-    <p:sldId id="259" r:id="R02039e78b6574e6f"/>
-    <p:sldId id="260" r:id="R9c72c5f556dc4060"/>
-    <p:sldId id="261" r:id="R17376963fbea4737"/>
-    <p:sldId id="262" r:id="R4e4bd5b85fca4094"/>
-    <p:sldId id="263" r:id="Rc88f61daf41a4bb9"/>
-    <p:sldId id="264" r:id="R4657d91987d34011"/>
+    <p:sldId id="256" r:id="R7c5abc7267084eeb"/>
+    <p:sldId id="257" r:id="R36d24a062d2e412d"/>
+    <p:sldId id="258" r:id="Rb1f374de623f4c2d"/>
+    <p:sldId id="259" r:id="R39e6f35a9bc64002"/>
+    <p:sldId id="260" r:id="R2d5fec97b482473c"/>
+    <p:sldId id="261" r:id="Rcb15415e02144c65"/>
+    <p:sldId id="262" r:id="R00d2dd4e8e50440c"/>
+    <p:sldId id="263" r:id="R1cbe578a1beb4634"/>
+    <p:sldId id="264" r:id="R3a6e721a5b9345b2"/>
   </p:sldIdLst>
   <p:sldSz cx="12192000" cy="6858000"/>
   <p:notesSz cx="6858000" cy="9144000"/>
@@ -1671,7 +1671,19 @@
                 <a:latin typeface="Calibri"/>
                 <a:ea typeface="Calibri"/>
               </a:rPr>
-              <a:t>In-repo: skills/presentations/classic-public-cases.md</a:t>
+              <a:t>CONTENT TEMPLATE ONLY — do not copy visual design (colors, margins, fonts) as a brand system.</a:t>
+            </a:r>
+          </a:p>
+          <a:p xmlns:a="http://schemas.openxmlformats.org/drawingml/2006/main">
+            <a:r>
+              <a:rPr lang="en-US" sz="1500" b="0">
+                <a:solidFill>
+                  <a:srgbClr val="1A202C"/>
+                </a:solidFill>
+                <a:latin typeface="Calibri"/>
+                <a:ea typeface="Calibri"/>
+              </a:rPr>
+              <a:t>In-repo: skills/presentations/classic-public-cases.md · assets/README.md (agent notice)</a:t>
             </a:r>
           </a:p>
         </p:txBody>
